--- a/public/videos/repositories/bowling-lane-alert/bowling-lane-alert-tech-preview.pptx
+++ b/public/videos/repositories/bowling-lane-alert/bowling-lane-alert-tech-preview.pptx
@@ -134,7 +134,7 @@
           <p:cNvPr id="2" name="タイトル 1">
             <a:extLst>
               <a:ext uri="{FF2B5EF4-FFF2-40B4-BE49-F238E27FC236}">
-                <a16:creationId xmlns:a16="http://schemas.microsoft.com/office/drawing/2014/main" id="{456A82EB-6FAF-347A-904D-7B0DAC5832CE}"/>
+                <a16:creationId xmlns:a16="http://schemas.microsoft.com/office/drawing/2014/main" id="{10DB0E6E-3002-FDD3-2248-204A0E11DEE1}"/>
               </a:ext>
             </a:extLst>
           </p:cNvPr>
@@ -171,7 +171,7 @@
           <p:cNvPr id="3" name="字幕 2">
             <a:extLst>
               <a:ext uri="{FF2B5EF4-FFF2-40B4-BE49-F238E27FC236}">
-                <a16:creationId xmlns:a16="http://schemas.microsoft.com/office/drawing/2014/main" id="{93C75EBB-934A-149C-969A-D5FD2E675749}"/>
+                <a16:creationId xmlns:a16="http://schemas.microsoft.com/office/drawing/2014/main" id="{9877AA23-82DE-C4D8-1F7F-610AAE791425}"/>
               </a:ext>
             </a:extLst>
           </p:cNvPr>
@@ -241,7 +241,7 @@
           <p:cNvPr id="4" name="日付プレースホルダー 3">
             <a:extLst>
               <a:ext uri="{FF2B5EF4-FFF2-40B4-BE49-F238E27FC236}">
-                <a16:creationId xmlns:a16="http://schemas.microsoft.com/office/drawing/2014/main" id="{34C13FDF-F45B-2635-3688-4E8E555EDB8E}"/>
+                <a16:creationId xmlns:a16="http://schemas.microsoft.com/office/drawing/2014/main" id="{6741A776-D4F7-00DF-4070-1508ABD29A83}"/>
               </a:ext>
             </a:extLst>
           </p:cNvPr>
@@ -257,7 +257,7 @@
           <a:bodyPr/>
           <a:lstStyle/>
           <a:p>
-            <a:fld id="{A8BFD11C-CA75-40A0-AB83-419F1E813C88}" type="datetimeFigureOut">
+            <a:fld id="{60872920-0609-4E1C-889D-CB1D901CB9A6}" type="datetimeFigureOut">
               <a:rPr kumimoji="1" lang="ja-JP" altLang="en-US" smtClean="0"/>
               <a:t>2026/7/30</a:t>
             </a:fld>
@@ -270,7 +270,7 @@
           <p:cNvPr id="5" name="フッター プレースホルダー 4">
             <a:extLst>
               <a:ext uri="{FF2B5EF4-FFF2-40B4-BE49-F238E27FC236}">
-                <a16:creationId xmlns:a16="http://schemas.microsoft.com/office/drawing/2014/main" id="{2E74418F-7F92-E16D-9F2C-3AC07233A958}"/>
+                <a16:creationId xmlns:a16="http://schemas.microsoft.com/office/drawing/2014/main" id="{ED2FE25B-C4FD-D313-19A2-FAD00568B63A}"/>
               </a:ext>
             </a:extLst>
           </p:cNvPr>
@@ -295,7 +295,7 @@
           <p:cNvPr id="6" name="スライド番号プレースホルダー 5">
             <a:extLst>
               <a:ext uri="{FF2B5EF4-FFF2-40B4-BE49-F238E27FC236}">
-                <a16:creationId xmlns:a16="http://schemas.microsoft.com/office/drawing/2014/main" id="{7474B6A2-67A7-FD53-997C-81014D9BA354}"/>
+                <a16:creationId xmlns:a16="http://schemas.microsoft.com/office/drawing/2014/main" id="{E5BB3FCA-B90E-A9EF-567C-A928D503DC2C}"/>
               </a:ext>
             </a:extLst>
           </p:cNvPr>
@@ -311,7 +311,7 @@
           <a:bodyPr/>
           <a:lstStyle/>
           <a:p>
-            <a:fld id="{3F373A78-01F1-4F7D-9C26-7F9DD59D8F53}" type="slidenum">
+            <a:fld id="{9F211E95-DB63-4B1D-A3E8-7116A534ED0D}" type="slidenum">
               <a:rPr kumimoji="1" lang="ja-JP" altLang="en-US" smtClean="0"/>
               <a:t>‹#›</a:t>
             </a:fld>
@@ -322,7 +322,7 @@
     </p:spTree>
     <p:extLst>
       <p:ext uri="{BB962C8B-B14F-4D97-AF65-F5344CB8AC3E}">
-        <p14:creationId xmlns:p14="http://schemas.microsoft.com/office/powerpoint/2010/main" val="2158818899"/>
+        <p14:creationId xmlns:p14="http://schemas.microsoft.com/office/powerpoint/2010/main" val="3965976172"/>
       </p:ext>
     </p:extLst>
   </p:cSld>
@@ -354,7 +354,7 @@
           <p:cNvPr id="2" name="タイトル 1">
             <a:extLst>
               <a:ext uri="{FF2B5EF4-FFF2-40B4-BE49-F238E27FC236}">
-                <a16:creationId xmlns:a16="http://schemas.microsoft.com/office/drawing/2014/main" id="{62E27888-366F-4107-8EB2-6353975771FF}"/>
+                <a16:creationId xmlns:a16="http://schemas.microsoft.com/office/drawing/2014/main" id="{9F8708F5-7D0D-0D9F-1D06-02EA923BF0CA}"/>
               </a:ext>
             </a:extLst>
           </p:cNvPr>
@@ -382,7 +382,7 @@
           <p:cNvPr id="3" name="縦書きテキスト プレースホルダー 2">
             <a:extLst>
               <a:ext uri="{FF2B5EF4-FFF2-40B4-BE49-F238E27FC236}">
-                <a16:creationId xmlns:a16="http://schemas.microsoft.com/office/drawing/2014/main" id="{D268D4C0-DA02-4F13-71A0-654A2669FEB7}"/>
+                <a16:creationId xmlns:a16="http://schemas.microsoft.com/office/drawing/2014/main" id="{1D77CC45-68D2-BB22-741F-152AF0F3F8AC}"/>
               </a:ext>
             </a:extLst>
           </p:cNvPr>
@@ -471,7 +471,7 @@
           <p:cNvPr id="4" name="日付プレースホルダー 3">
             <a:extLst>
               <a:ext uri="{FF2B5EF4-FFF2-40B4-BE49-F238E27FC236}">
-                <a16:creationId xmlns:a16="http://schemas.microsoft.com/office/drawing/2014/main" id="{74D4CC60-468F-CAC6-BC7B-4C902602F712}"/>
+                <a16:creationId xmlns:a16="http://schemas.microsoft.com/office/drawing/2014/main" id="{134CD4DF-3FAE-20A0-F6A7-646B1B81CD18}"/>
               </a:ext>
             </a:extLst>
           </p:cNvPr>
@@ -487,7 +487,7 @@
           <a:bodyPr/>
           <a:lstStyle/>
           <a:p>
-            <a:fld id="{A8BFD11C-CA75-40A0-AB83-419F1E813C88}" type="datetimeFigureOut">
+            <a:fld id="{60872920-0609-4E1C-889D-CB1D901CB9A6}" type="datetimeFigureOut">
               <a:rPr kumimoji="1" lang="ja-JP" altLang="en-US" smtClean="0"/>
               <a:t>2026/7/30</a:t>
             </a:fld>
@@ -500,7 +500,7 @@
           <p:cNvPr id="5" name="フッター プレースホルダー 4">
             <a:extLst>
               <a:ext uri="{FF2B5EF4-FFF2-40B4-BE49-F238E27FC236}">
-                <a16:creationId xmlns:a16="http://schemas.microsoft.com/office/drawing/2014/main" id="{2107711E-ABD1-9B23-C760-22EAD94EE665}"/>
+                <a16:creationId xmlns:a16="http://schemas.microsoft.com/office/drawing/2014/main" id="{794327CB-907C-1FCB-90F1-306AF13345A8}"/>
               </a:ext>
             </a:extLst>
           </p:cNvPr>
@@ -525,7 +525,7 @@
           <p:cNvPr id="6" name="スライド番号プレースホルダー 5">
             <a:extLst>
               <a:ext uri="{FF2B5EF4-FFF2-40B4-BE49-F238E27FC236}">
-                <a16:creationId xmlns:a16="http://schemas.microsoft.com/office/drawing/2014/main" id="{395C71FD-432E-2179-209E-1B172310C9B7}"/>
+                <a16:creationId xmlns:a16="http://schemas.microsoft.com/office/drawing/2014/main" id="{8CCAFA99-735D-781C-122F-125028F99D6F}"/>
               </a:ext>
             </a:extLst>
           </p:cNvPr>
@@ -541,7 +541,7 @@
           <a:bodyPr/>
           <a:lstStyle/>
           <a:p>
-            <a:fld id="{3F373A78-01F1-4F7D-9C26-7F9DD59D8F53}" type="slidenum">
+            <a:fld id="{9F211E95-DB63-4B1D-A3E8-7116A534ED0D}" type="slidenum">
               <a:rPr kumimoji="1" lang="ja-JP" altLang="en-US" smtClean="0"/>
               <a:t>‹#›</a:t>
             </a:fld>
@@ -552,7 +552,7 @@
     </p:spTree>
     <p:extLst>
       <p:ext uri="{BB962C8B-B14F-4D97-AF65-F5344CB8AC3E}">
-        <p14:creationId xmlns:p14="http://schemas.microsoft.com/office/powerpoint/2010/main" val="2129059292"/>
+        <p14:creationId xmlns:p14="http://schemas.microsoft.com/office/powerpoint/2010/main" val="1491174239"/>
       </p:ext>
     </p:extLst>
   </p:cSld>
@@ -584,7 +584,7 @@
           <p:cNvPr id="2" name="縦書きタイトル 1">
             <a:extLst>
               <a:ext uri="{FF2B5EF4-FFF2-40B4-BE49-F238E27FC236}">
-                <a16:creationId xmlns:a16="http://schemas.microsoft.com/office/drawing/2014/main" id="{F8129E1F-C9DF-75E3-FD9C-8D449D75914B}"/>
+                <a16:creationId xmlns:a16="http://schemas.microsoft.com/office/drawing/2014/main" id="{0A09465F-0C20-35CF-458E-5C974535E610}"/>
               </a:ext>
             </a:extLst>
           </p:cNvPr>
@@ -617,7 +617,7 @@
           <p:cNvPr id="3" name="縦書きテキスト プレースホルダー 2">
             <a:extLst>
               <a:ext uri="{FF2B5EF4-FFF2-40B4-BE49-F238E27FC236}">
-                <a16:creationId xmlns:a16="http://schemas.microsoft.com/office/drawing/2014/main" id="{EF4CED0A-88DB-F1C1-2E61-EDC0116D7B68}"/>
+                <a16:creationId xmlns:a16="http://schemas.microsoft.com/office/drawing/2014/main" id="{9333C08C-86D8-5564-3946-CD8B5942228E}"/>
               </a:ext>
             </a:extLst>
           </p:cNvPr>
@@ -711,7 +711,7 @@
           <p:cNvPr id="4" name="日付プレースホルダー 3">
             <a:extLst>
               <a:ext uri="{FF2B5EF4-FFF2-40B4-BE49-F238E27FC236}">
-                <a16:creationId xmlns:a16="http://schemas.microsoft.com/office/drawing/2014/main" id="{D7A27622-8F06-DA45-0D65-4CA809341298}"/>
+                <a16:creationId xmlns:a16="http://schemas.microsoft.com/office/drawing/2014/main" id="{6FF880D9-FFBF-838D-1C28-5E7D7CADC56B}"/>
               </a:ext>
             </a:extLst>
           </p:cNvPr>
@@ -727,7 +727,7 @@
           <a:bodyPr/>
           <a:lstStyle/>
           <a:p>
-            <a:fld id="{A8BFD11C-CA75-40A0-AB83-419F1E813C88}" type="datetimeFigureOut">
+            <a:fld id="{60872920-0609-4E1C-889D-CB1D901CB9A6}" type="datetimeFigureOut">
               <a:rPr kumimoji="1" lang="ja-JP" altLang="en-US" smtClean="0"/>
               <a:t>2026/7/30</a:t>
             </a:fld>
@@ -740,7 +740,7 @@
           <p:cNvPr id="5" name="フッター プレースホルダー 4">
             <a:extLst>
               <a:ext uri="{FF2B5EF4-FFF2-40B4-BE49-F238E27FC236}">
-                <a16:creationId xmlns:a16="http://schemas.microsoft.com/office/drawing/2014/main" id="{C06AD330-E405-EEB6-2F90-EEC434997775}"/>
+                <a16:creationId xmlns:a16="http://schemas.microsoft.com/office/drawing/2014/main" id="{A5E4AE19-BC71-35A8-26A7-E6D673715029}"/>
               </a:ext>
             </a:extLst>
           </p:cNvPr>
@@ -765,7 +765,7 @@
           <p:cNvPr id="6" name="スライド番号プレースホルダー 5">
             <a:extLst>
               <a:ext uri="{FF2B5EF4-FFF2-40B4-BE49-F238E27FC236}">
-                <a16:creationId xmlns:a16="http://schemas.microsoft.com/office/drawing/2014/main" id="{22540618-A0EE-3E99-F326-D7E6DFCA9A15}"/>
+                <a16:creationId xmlns:a16="http://schemas.microsoft.com/office/drawing/2014/main" id="{8EF02924-D8D2-D581-DE0B-A18A13ECD6EB}"/>
               </a:ext>
             </a:extLst>
           </p:cNvPr>
@@ -781,7 +781,7 @@
           <a:bodyPr/>
           <a:lstStyle/>
           <a:p>
-            <a:fld id="{3F373A78-01F1-4F7D-9C26-7F9DD59D8F53}" type="slidenum">
+            <a:fld id="{9F211E95-DB63-4B1D-A3E8-7116A534ED0D}" type="slidenum">
               <a:rPr kumimoji="1" lang="ja-JP" altLang="en-US" smtClean="0"/>
               <a:t>‹#›</a:t>
             </a:fld>
@@ -792,7 +792,7 @@
     </p:spTree>
     <p:extLst>
       <p:ext uri="{BB962C8B-B14F-4D97-AF65-F5344CB8AC3E}">
-        <p14:creationId xmlns:p14="http://schemas.microsoft.com/office/powerpoint/2010/main" val="4153401538"/>
+        <p14:creationId xmlns:p14="http://schemas.microsoft.com/office/powerpoint/2010/main" val="854038986"/>
       </p:ext>
     </p:extLst>
   </p:cSld>
@@ -824,7 +824,7 @@
           <p:cNvPr id="2" name="タイトル 1">
             <a:extLst>
               <a:ext uri="{FF2B5EF4-FFF2-40B4-BE49-F238E27FC236}">
-                <a16:creationId xmlns:a16="http://schemas.microsoft.com/office/drawing/2014/main" id="{88199467-E3D2-E4D2-368B-79973DB243F5}"/>
+                <a16:creationId xmlns:a16="http://schemas.microsoft.com/office/drawing/2014/main" id="{BF99C816-4682-DB34-5BB8-9C0D1FB2B4B7}"/>
               </a:ext>
             </a:extLst>
           </p:cNvPr>
@@ -852,7 +852,7 @@
           <p:cNvPr id="3" name="コンテンツ プレースホルダー 2">
             <a:extLst>
               <a:ext uri="{FF2B5EF4-FFF2-40B4-BE49-F238E27FC236}">
-                <a16:creationId xmlns:a16="http://schemas.microsoft.com/office/drawing/2014/main" id="{67780549-F5E5-513F-240B-81D4F4692D0A}"/>
+                <a16:creationId xmlns:a16="http://schemas.microsoft.com/office/drawing/2014/main" id="{8B166597-A83C-528C-2BB2-1C8A2E7C3BF9}"/>
               </a:ext>
             </a:extLst>
           </p:cNvPr>
@@ -941,7 +941,7 @@
           <p:cNvPr id="4" name="日付プレースホルダー 3">
             <a:extLst>
               <a:ext uri="{FF2B5EF4-FFF2-40B4-BE49-F238E27FC236}">
-                <a16:creationId xmlns:a16="http://schemas.microsoft.com/office/drawing/2014/main" id="{D5E02E93-1E8B-7E1A-FF45-728D75896F76}"/>
+                <a16:creationId xmlns:a16="http://schemas.microsoft.com/office/drawing/2014/main" id="{ACF0F258-ABE9-5083-EB5E-930D597727AD}"/>
               </a:ext>
             </a:extLst>
           </p:cNvPr>
@@ -957,7 +957,7 @@
           <a:bodyPr/>
           <a:lstStyle/>
           <a:p>
-            <a:fld id="{A8BFD11C-CA75-40A0-AB83-419F1E813C88}" type="datetimeFigureOut">
+            <a:fld id="{60872920-0609-4E1C-889D-CB1D901CB9A6}" type="datetimeFigureOut">
               <a:rPr kumimoji="1" lang="ja-JP" altLang="en-US" smtClean="0"/>
               <a:t>2026/7/30</a:t>
             </a:fld>
@@ -970,7 +970,7 @@
           <p:cNvPr id="5" name="フッター プレースホルダー 4">
             <a:extLst>
               <a:ext uri="{FF2B5EF4-FFF2-40B4-BE49-F238E27FC236}">
-                <a16:creationId xmlns:a16="http://schemas.microsoft.com/office/drawing/2014/main" id="{45E95367-D559-D41F-66F3-0D00E43A9A1F}"/>
+                <a16:creationId xmlns:a16="http://schemas.microsoft.com/office/drawing/2014/main" id="{E68463EF-6DDE-C392-AA75-22B533E78613}"/>
               </a:ext>
             </a:extLst>
           </p:cNvPr>
@@ -995,7 +995,7 @@
           <p:cNvPr id="6" name="スライド番号プレースホルダー 5">
             <a:extLst>
               <a:ext uri="{FF2B5EF4-FFF2-40B4-BE49-F238E27FC236}">
-                <a16:creationId xmlns:a16="http://schemas.microsoft.com/office/drawing/2014/main" id="{F4DDC093-C6AA-C47A-1D6B-5DA3AE5695EB}"/>
+                <a16:creationId xmlns:a16="http://schemas.microsoft.com/office/drawing/2014/main" id="{C4EF5167-A135-85EB-406C-5EA75019C077}"/>
               </a:ext>
             </a:extLst>
           </p:cNvPr>
@@ -1011,7 +1011,7 @@
           <a:bodyPr/>
           <a:lstStyle/>
           <a:p>
-            <a:fld id="{3F373A78-01F1-4F7D-9C26-7F9DD59D8F53}" type="slidenum">
+            <a:fld id="{9F211E95-DB63-4B1D-A3E8-7116A534ED0D}" type="slidenum">
               <a:rPr kumimoji="1" lang="ja-JP" altLang="en-US" smtClean="0"/>
               <a:t>‹#›</a:t>
             </a:fld>
@@ -1022,7 +1022,7 @@
     </p:spTree>
     <p:extLst>
       <p:ext uri="{BB962C8B-B14F-4D97-AF65-F5344CB8AC3E}">
-        <p14:creationId xmlns:p14="http://schemas.microsoft.com/office/powerpoint/2010/main" val="215086075"/>
+        <p14:creationId xmlns:p14="http://schemas.microsoft.com/office/powerpoint/2010/main" val="1606194143"/>
       </p:ext>
     </p:extLst>
   </p:cSld>
@@ -1054,7 +1054,7 @@
           <p:cNvPr id="2" name="タイトル 1">
             <a:extLst>
               <a:ext uri="{FF2B5EF4-FFF2-40B4-BE49-F238E27FC236}">
-                <a16:creationId xmlns:a16="http://schemas.microsoft.com/office/drawing/2014/main" id="{4978F952-334A-73CB-AADD-EC7AF567B351}"/>
+                <a16:creationId xmlns:a16="http://schemas.microsoft.com/office/drawing/2014/main" id="{18AB4029-9F66-1EF8-53E4-67D920FFE00E}"/>
               </a:ext>
             </a:extLst>
           </p:cNvPr>
@@ -1091,7 +1091,7 @@
           <p:cNvPr id="3" name="テキスト プレースホルダー 2">
             <a:extLst>
               <a:ext uri="{FF2B5EF4-FFF2-40B4-BE49-F238E27FC236}">
-                <a16:creationId xmlns:a16="http://schemas.microsoft.com/office/drawing/2014/main" id="{B2D9121A-C5BA-74A9-933F-6030B323449F}"/>
+                <a16:creationId xmlns:a16="http://schemas.microsoft.com/office/drawing/2014/main" id="{69C4F9AE-5F05-694A-B314-15D7C77A8DF4}"/>
               </a:ext>
             </a:extLst>
           </p:cNvPr>
@@ -1216,7 +1216,7 @@
           <p:cNvPr id="4" name="日付プレースホルダー 3">
             <a:extLst>
               <a:ext uri="{FF2B5EF4-FFF2-40B4-BE49-F238E27FC236}">
-                <a16:creationId xmlns:a16="http://schemas.microsoft.com/office/drawing/2014/main" id="{01AE0EE4-A260-6AD7-0B54-E5B3C3B92454}"/>
+                <a16:creationId xmlns:a16="http://schemas.microsoft.com/office/drawing/2014/main" id="{EC83F615-5189-74F7-C3B0-3755ADE5352C}"/>
               </a:ext>
             </a:extLst>
           </p:cNvPr>
@@ -1232,7 +1232,7 @@
           <a:bodyPr/>
           <a:lstStyle/>
           <a:p>
-            <a:fld id="{A8BFD11C-CA75-40A0-AB83-419F1E813C88}" type="datetimeFigureOut">
+            <a:fld id="{60872920-0609-4E1C-889D-CB1D901CB9A6}" type="datetimeFigureOut">
               <a:rPr kumimoji="1" lang="ja-JP" altLang="en-US" smtClean="0"/>
               <a:t>2026/7/30</a:t>
             </a:fld>
@@ -1245,7 +1245,7 @@
           <p:cNvPr id="5" name="フッター プレースホルダー 4">
             <a:extLst>
               <a:ext uri="{FF2B5EF4-FFF2-40B4-BE49-F238E27FC236}">
-                <a16:creationId xmlns:a16="http://schemas.microsoft.com/office/drawing/2014/main" id="{38660052-A7FF-968B-0A67-B8539A4B510B}"/>
+                <a16:creationId xmlns:a16="http://schemas.microsoft.com/office/drawing/2014/main" id="{B0DFEA21-2662-9142-7899-5DACC17B11C9}"/>
               </a:ext>
             </a:extLst>
           </p:cNvPr>
@@ -1270,7 +1270,7 @@
           <p:cNvPr id="6" name="スライド番号プレースホルダー 5">
             <a:extLst>
               <a:ext uri="{FF2B5EF4-FFF2-40B4-BE49-F238E27FC236}">
-                <a16:creationId xmlns:a16="http://schemas.microsoft.com/office/drawing/2014/main" id="{FED162D2-787B-9364-5D36-7C8F1B2FB050}"/>
+                <a16:creationId xmlns:a16="http://schemas.microsoft.com/office/drawing/2014/main" id="{A5BF3E81-6D10-21B7-D212-8190DFEE4151}"/>
               </a:ext>
             </a:extLst>
           </p:cNvPr>
@@ -1286,7 +1286,7 @@
           <a:bodyPr/>
           <a:lstStyle/>
           <a:p>
-            <a:fld id="{3F373A78-01F1-4F7D-9C26-7F9DD59D8F53}" type="slidenum">
+            <a:fld id="{9F211E95-DB63-4B1D-A3E8-7116A534ED0D}" type="slidenum">
               <a:rPr kumimoji="1" lang="ja-JP" altLang="en-US" smtClean="0"/>
               <a:t>‹#›</a:t>
             </a:fld>
@@ -1297,7 +1297,7 @@
     </p:spTree>
     <p:extLst>
       <p:ext uri="{BB962C8B-B14F-4D97-AF65-F5344CB8AC3E}">
-        <p14:creationId xmlns:p14="http://schemas.microsoft.com/office/powerpoint/2010/main" val="279680427"/>
+        <p14:creationId xmlns:p14="http://schemas.microsoft.com/office/powerpoint/2010/main" val="3666070968"/>
       </p:ext>
     </p:extLst>
   </p:cSld>
@@ -1329,7 +1329,7 @@
           <p:cNvPr id="2" name="タイトル 1">
             <a:extLst>
               <a:ext uri="{FF2B5EF4-FFF2-40B4-BE49-F238E27FC236}">
-                <a16:creationId xmlns:a16="http://schemas.microsoft.com/office/drawing/2014/main" id="{A62A96E3-51CB-4758-2268-02B18593181B}"/>
+                <a16:creationId xmlns:a16="http://schemas.microsoft.com/office/drawing/2014/main" id="{C78D72A4-B2CA-A1B5-F8BA-71748A063C8B}"/>
               </a:ext>
             </a:extLst>
           </p:cNvPr>
@@ -1357,7 +1357,7 @@
           <p:cNvPr id="3" name="コンテンツ プレースホルダー 2">
             <a:extLst>
               <a:ext uri="{FF2B5EF4-FFF2-40B4-BE49-F238E27FC236}">
-                <a16:creationId xmlns:a16="http://schemas.microsoft.com/office/drawing/2014/main" id="{A1063D0F-3F88-698A-6F82-ECB74001DF35}"/>
+                <a16:creationId xmlns:a16="http://schemas.microsoft.com/office/drawing/2014/main" id="{7D66788C-6479-A242-0C54-EE31A63AE0FA}"/>
               </a:ext>
             </a:extLst>
           </p:cNvPr>
@@ -1451,7 +1451,7 @@
           <p:cNvPr id="4" name="コンテンツ プレースホルダー 3">
             <a:extLst>
               <a:ext uri="{FF2B5EF4-FFF2-40B4-BE49-F238E27FC236}">
-                <a16:creationId xmlns:a16="http://schemas.microsoft.com/office/drawing/2014/main" id="{7D5A7AAA-403C-4BD3-0A6A-57EE2835F0E8}"/>
+                <a16:creationId xmlns:a16="http://schemas.microsoft.com/office/drawing/2014/main" id="{4E179FCB-4016-C3A6-B4F8-FE45CEA96090}"/>
               </a:ext>
             </a:extLst>
           </p:cNvPr>
@@ -1545,7 +1545,7 @@
           <p:cNvPr id="5" name="日付プレースホルダー 4">
             <a:extLst>
               <a:ext uri="{FF2B5EF4-FFF2-40B4-BE49-F238E27FC236}">
-                <a16:creationId xmlns:a16="http://schemas.microsoft.com/office/drawing/2014/main" id="{F9FD1C7B-7830-7755-3BBB-7F820090C024}"/>
+                <a16:creationId xmlns:a16="http://schemas.microsoft.com/office/drawing/2014/main" id="{3FF6E75E-1C0C-EB2B-E380-6B07E0A8039F}"/>
               </a:ext>
             </a:extLst>
           </p:cNvPr>
@@ -1561,7 +1561,7 @@
           <a:bodyPr/>
           <a:lstStyle/>
           <a:p>
-            <a:fld id="{A8BFD11C-CA75-40A0-AB83-419F1E813C88}" type="datetimeFigureOut">
+            <a:fld id="{60872920-0609-4E1C-889D-CB1D901CB9A6}" type="datetimeFigureOut">
               <a:rPr kumimoji="1" lang="ja-JP" altLang="en-US" smtClean="0"/>
               <a:t>2026/7/30</a:t>
             </a:fld>
@@ -1574,7 +1574,7 @@
           <p:cNvPr id="6" name="フッター プレースホルダー 5">
             <a:extLst>
               <a:ext uri="{FF2B5EF4-FFF2-40B4-BE49-F238E27FC236}">
-                <a16:creationId xmlns:a16="http://schemas.microsoft.com/office/drawing/2014/main" id="{B03ACE8F-C5A0-043A-0ED5-721DAFF75407}"/>
+                <a16:creationId xmlns:a16="http://schemas.microsoft.com/office/drawing/2014/main" id="{56D508CF-9F68-7939-8989-6E2D736359A2}"/>
               </a:ext>
             </a:extLst>
           </p:cNvPr>
@@ -1599,7 +1599,7 @@
           <p:cNvPr id="7" name="スライド番号プレースホルダー 6">
             <a:extLst>
               <a:ext uri="{FF2B5EF4-FFF2-40B4-BE49-F238E27FC236}">
-                <a16:creationId xmlns:a16="http://schemas.microsoft.com/office/drawing/2014/main" id="{80D1FD25-9A13-2130-5B2F-665186471546}"/>
+                <a16:creationId xmlns:a16="http://schemas.microsoft.com/office/drawing/2014/main" id="{DB0745F3-1000-D2CB-3264-55597014CA9E}"/>
               </a:ext>
             </a:extLst>
           </p:cNvPr>
@@ -1615,7 +1615,7 @@
           <a:bodyPr/>
           <a:lstStyle/>
           <a:p>
-            <a:fld id="{3F373A78-01F1-4F7D-9C26-7F9DD59D8F53}" type="slidenum">
+            <a:fld id="{9F211E95-DB63-4B1D-A3E8-7116A534ED0D}" type="slidenum">
               <a:rPr kumimoji="1" lang="ja-JP" altLang="en-US" smtClean="0"/>
               <a:t>‹#›</a:t>
             </a:fld>
@@ -1626,7 +1626,7 @@
     </p:spTree>
     <p:extLst>
       <p:ext uri="{BB962C8B-B14F-4D97-AF65-F5344CB8AC3E}">
-        <p14:creationId xmlns:p14="http://schemas.microsoft.com/office/powerpoint/2010/main" val="2197062224"/>
+        <p14:creationId xmlns:p14="http://schemas.microsoft.com/office/powerpoint/2010/main" val="296945485"/>
       </p:ext>
     </p:extLst>
   </p:cSld>
@@ -1658,7 +1658,7 @@
           <p:cNvPr id="2" name="タイトル 1">
             <a:extLst>
               <a:ext uri="{FF2B5EF4-FFF2-40B4-BE49-F238E27FC236}">
-                <a16:creationId xmlns:a16="http://schemas.microsoft.com/office/drawing/2014/main" id="{5EE0AFA2-EF47-177A-E725-E5E3768E3FE3}"/>
+                <a16:creationId xmlns:a16="http://schemas.microsoft.com/office/drawing/2014/main" id="{F664A8AA-DE43-7029-0CA4-2EEFCD09E3A5}"/>
               </a:ext>
             </a:extLst>
           </p:cNvPr>
@@ -1691,7 +1691,7 @@
           <p:cNvPr id="3" name="テキスト プレースホルダー 2">
             <a:extLst>
               <a:ext uri="{FF2B5EF4-FFF2-40B4-BE49-F238E27FC236}">
-                <a16:creationId xmlns:a16="http://schemas.microsoft.com/office/drawing/2014/main" id="{47173165-048B-3FAC-40A7-113F634907DF}"/>
+                <a16:creationId xmlns:a16="http://schemas.microsoft.com/office/drawing/2014/main" id="{CDADFB74-12BF-B7A0-D6D2-C24ED095B1F7}"/>
               </a:ext>
             </a:extLst>
           </p:cNvPr>
@@ -1762,7 +1762,7 @@
           <p:cNvPr id="4" name="コンテンツ プレースホルダー 3">
             <a:extLst>
               <a:ext uri="{FF2B5EF4-FFF2-40B4-BE49-F238E27FC236}">
-                <a16:creationId xmlns:a16="http://schemas.microsoft.com/office/drawing/2014/main" id="{180F73AD-ABF1-B07F-5730-7D20F881A066}"/>
+                <a16:creationId xmlns:a16="http://schemas.microsoft.com/office/drawing/2014/main" id="{04705496-58BB-742E-F4B4-420F66267F43}"/>
               </a:ext>
             </a:extLst>
           </p:cNvPr>
@@ -1856,7 +1856,7 @@
           <p:cNvPr id="5" name="テキスト プレースホルダー 4">
             <a:extLst>
               <a:ext uri="{FF2B5EF4-FFF2-40B4-BE49-F238E27FC236}">
-                <a16:creationId xmlns:a16="http://schemas.microsoft.com/office/drawing/2014/main" id="{0126576C-E820-E887-4804-3363E47C0DBE}"/>
+                <a16:creationId xmlns:a16="http://schemas.microsoft.com/office/drawing/2014/main" id="{479A1303-108A-8FB7-5F84-493CA573B067}"/>
               </a:ext>
             </a:extLst>
           </p:cNvPr>
@@ -1927,7 +1927,7 @@
           <p:cNvPr id="6" name="コンテンツ プレースホルダー 5">
             <a:extLst>
               <a:ext uri="{FF2B5EF4-FFF2-40B4-BE49-F238E27FC236}">
-                <a16:creationId xmlns:a16="http://schemas.microsoft.com/office/drawing/2014/main" id="{45F17C42-C311-DB19-0711-4F6F1F43FB22}"/>
+                <a16:creationId xmlns:a16="http://schemas.microsoft.com/office/drawing/2014/main" id="{C98F9C3E-AB8B-4959-BD8F-D5FC3A41BDB0}"/>
               </a:ext>
             </a:extLst>
           </p:cNvPr>
@@ -2021,7 +2021,7 @@
           <p:cNvPr id="7" name="日付プレースホルダー 6">
             <a:extLst>
               <a:ext uri="{FF2B5EF4-FFF2-40B4-BE49-F238E27FC236}">
-                <a16:creationId xmlns:a16="http://schemas.microsoft.com/office/drawing/2014/main" id="{781A7BBC-05D6-087A-5F3A-42CF8F448FC8}"/>
+                <a16:creationId xmlns:a16="http://schemas.microsoft.com/office/drawing/2014/main" id="{2E855047-F554-E051-3016-17EDB6566D25}"/>
               </a:ext>
             </a:extLst>
           </p:cNvPr>
@@ -2037,7 +2037,7 @@
           <a:bodyPr/>
           <a:lstStyle/>
           <a:p>
-            <a:fld id="{A8BFD11C-CA75-40A0-AB83-419F1E813C88}" type="datetimeFigureOut">
+            <a:fld id="{60872920-0609-4E1C-889D-CB1D901CB9A6}" type="datetimeFigureOut">
               <a:rPr kumimoji="1" lang="ja-JP" altLang="en-US" smtClean="0"/>
               <a:t>2026/7/30</a:t>
             </a:fld>
@@ -2050,7 +2050,7 @@
           <p:cNvPr id="8" name="フッター プレースホルダー 7">
             <a:extLst>
               <a:ext uri="{FF2B5EF4-FFF2-40B4-BE49-F238E27FC236}">
-                <a16:creationId xmlns:a16="http://schemas.microsoft.com/office/drawing/2014/main" id="{926CE390-B946-08D5-128E-8A080ED82F57}"/>
+                <a16:creationId xmlns:a16="http://schemas.microsoft.com/office/drawing/2014/main" id="{273E89AC-DA33-CC38-97D9-BCE1738C53B4}"/>
               </a:ext>
             </a:extLst>
           </p:cNvPr>
@@ -2075,7 +2075,7 @@
           <p:cNvPr id="9" name="スライド番号プレースホルダー 8">
             <a:extLst>
               <a:ext uri="{FF2B5EF4-FFF2-40B4-BE49-F238E27FC236}">
-                <a16:creationId xmlns:a16="http://schemas.microsoft.com/office/drawing/2014/main" id="{18C2A9DD-3111-EE62-F49D-00EBB00F1674}"/>
+                <a16:creationId xmlns:a16="http://schemas.microsoft.com/office/drawing/2014/main" id="{C1AD6617-177C-B21F-F141-F6C9E9BD85F8}"/>
               </a:ext>
             </a:extLst>
           </p:cNvPr>
@@ -2091,7 +2091,7 @@
           <a:bodyPr/>
           <a:lstStyle/>
           <a:p>
-            <a:fld id="{3F373A78-01F1-4F7D-9C26-7F9DD59D8F53}" type="slidenum">
+            <a:fld id="{9F211E95-DB63-4B1D-A3E8-7116A534ED0D}" type="slidenum">
               <a:rPr kumimoji="1" lang="ja-JP" altLang="en-US" smtClean="0"/>
               <a:t>‹#›</a:t>
             </a:fld>
@@ -2102,7 +2102,7 @@
     </p:spTree>
     <p:extLst>
       <p:ext uri="{BB962C8B-B14F-4D97-AF65-F5344CB8AC3E}">
-        <p14:creationId xmlns:p14="http://schemas.microsoft.com/office/powerpoint/2010/main" val="4012698167"/>
+        <p14:creationId xmlns:p14="http://schemas.microsoft.com/office/powerpoint/2010/main" val="3039117516"/>
       </p:ext>
     </p:extLst>
   </p:cSld>
@@ -2134,7 +2134,7 @@
           <p:cNvPr id="2" name="タイトル 1">
             <a:extLst>
               <a:ext uri="{FF2B5EF4-FFF2-40B4-BE49-F238E27FC236}">
-                <a16:creationId xmlns:a16="http://schemas.microsoft.com/office/drawing/2014/main" id="{E2C037B4-0AB7-2038-5C70-8B1FC17E83CF}"/>
+                <a16:creationId xmlns:a16="http://schemas.microsoft.com/office/drawing/2014/main" id="{F9DDA56E-3E69-9F66-01DF-7FC374953333}"/>
               </a:ext>
             </a:extLst>
           </p:cNvPr>
@@ -2162,7 +2162,7 @@
           <p:cNvPr id="3" name="日付プレースホルダー 2">
             <a:extLst>
               <a:ext uri="{FF2B5EF4-FFF2-40B4-BE49-F238E27FC236}">
-                <a16:creationId xmlns:a16="http://schemas.microsoft.com/office/drawing/2014/main" id="{C9054116-3F22-5570-EE3B-9D77AD903A44}"/>
+                <a16:creationId xmlns:a16="http://schemas.microsoft.com/office/drawing/2014/main" id="{0C000210-9E85-7B1F-527A-A66F2AC637D7}"/>
               </a:ext>
             </a:extLst>
           </p:cNvPr>
@@ -2178,7 +2178,7 @@
           <a:bodyPr/>
           <a:lstStyle/>
           <a:p>
-            <a:fld id="{A8BFD11C-CA75-40A0-AB83-419F1E813C88}" type="datetimeFigureOut">
+            <a:fld id="{60872920-0609-4E1C-889D-CB1D901CB9A6}" type="datetimeFigureOut">
               <a:rPr kumimoji="1" lang="ja-JP" altLang="en-US" smtClean="0"/>
               <a:t>2026/7/30</a:t>
             </a:fld>
@@ -2191,7 +2191,7 @@
           <p:cNvPr id="4" name="フッター プレースホルダー 3">
             <a:extLst>
               <a:ext uri="{FF2B5EF4-FFF2-40B4-BE49-F238E27FC236}">
-                <a16:creationId xmlns:a16="http://schemas.microsoft.com/office/drawing/2014/main" id="{DA8E4BE8-8114-894B-3527-874AB00011B8}"/>
+                <a16:creationId xmlns:a16="http://schemas.microsoft.com/office/drawing/2014/main" id="{DDFF2D69-C27B-0CE3-3C4A-E082A54878F7}"/>
               </a:ext>
             </a:extLst>
           </p:cNvPr>
@@ -2216,7 +2216,7 @@
           <p:cNvPr id="5" name="スライド番号プレースホルダー 4">
             <a:extLst>
               <a:ext uri="{FF2B5EF4-FFF2-40B4-BE49-F238E27FC236}">
-                <a16:creationId xmlns:a16="http://schemas.microsoft.com/office/drawing/2014/main" id="{52F28BF2-DD26-9B3F-4531-0A42B8286568}"/>
+                <a16:creationId xmlns:a16="http://schemas.microsoft.com/office/drawing/2014/main" id="{C9697460-3699-9755-CD6A-361D63CFC417}"/>
               </a:ext>
             </a:extLst>
           </p:cNvPr>
@@ -2232,7 +2232,7 @@
           <a:bodyPr/>
           <a:lstStyle/>
           <a:p>
-            <a:fld id="{3F373A78-01F1-4F7D-9C26-7F9DD59D8F53}" type="slidenum">
+            <a:fld id="{9F211E95-DB63-4B1D-A3E8-7116A534ED0D}" type="slidenum">
               <a:rPr kumimoji="1" lang="ja-JP" altLang="en-US" smtClean="0"/>
               <a:t>‹#›</a:t>
             </a:fld>
@@ -2243,7 +2243,7 @@
     </p:spTree>
     <p:extLst>
       <p:ext uri="{BB962C8B-B14F-4D97-AF65-F5344CB8AC3E}">
-        <p14:creationId xmlns:p14="http://schemas.microsoft.com/office/powerpoint/2010/main" val="3159888195"/>
+        <p14:creationId xmlns:p14="http://schemas.microsoft.com/office/powerpoint/2010/main" val="280211930"/>
       </p:ext>
     </p:extLst>
   </p:cSld>
@@ -2275,7 +2275,7 @@
           <p:cNvPr id="2" name="日付プレースホルダー 1">
             <a:extLst>
               <a:ext uri="{FF2B5EF4-FFF2-40B4-BE49-F238E27FC236}">
-                <a16:creationId xmlns:a16="http://schemas.microsoft.com/office/drawing/2014/main" id="{CB13DC90-1245-77D8-1CE0-267FBE84408D}"/>
+                <a16:creationId xmlns:a16="http://schemas.microsoft.com/office/drawing/2014/main" id="{64420222-8947-A693-CA6D-44B6037968E9}"/>
               </a:ext>
             </a:extLst>
           </p:cNvPr>
@@ -2291,7 +2291,7 @@
           <a:bodyPr/>
           <a:lstStyle/>
           <a:p>
-            <a:fld id="{A8BFD11C-CA75-40A0-AB83-419F1E813C88}" type="datetimeFigureOut">
+            <a:fld id="{60872920-0609-4E1C-889D-CB1D901CB9A6}" type="datetimeFigureOut">
               <a:rPr kumimoji="1" lang="ja-JP" altLang="en-US" smtClean="0"/>
               <a:t>2026/7/30</a:t>
             </a:fld>
@@ -2304,7 +2304,7 @@
           <p:cNvPr id="3" name="フッター プレースホルダー 2">
             <a:extLst>
               <a:ext uri="{FF2B5EF4-FFF2-40B4-BE49-F238E27FC236}">
-                <a16:creationId xmlns:a16="http://schemas.microsoft.com/office/drawing/2014/main" id="{35B74BB3-F9F5-9006-CD65-86BACF12C9BD}"/>
+                <a16:creationId xmlns:a16="http://schemas.microsoft.com/office/drawing/2014/main" id="{BA15EB89-33A2-F9D9-9D8A-AEADF3428563}"/>
               </a:ext>
             </a:extLst>
           </p:cNvPr>
@@ -2329,7 +2329,7 @@
           <p:cNvPr id="4" name="スライド番号プレースホルダー 3">
             <a:extLst>
               <a:ext uri="{FF2B5EF4-FFF2-40B4-BE49-F238E27FC236}">
-                <a16:creationId xmlns:a16="http://schemas.microsoft.com/office/drawing/2014/main" id="{DF687096-09D9-1B2E-2BF6-24F3BEA89ADD}"/>
+                <a16:creationId xmlns:a16="http://schemas.microsoft.com/office/drawing/2014/main" id="{B8C40DA8-4759-AEBE-0971-779A9E920C19}"/>
               </a:ext>
             </a:extLst>
           </p:cNvPr>
@@ -2345,7 +2345,7 @@
           <a:bodyPr/>
           <a:lstStyle/>
           <a:p>
-            <a:fld id="{3F373A78-01F1-4F7D-9C26-7F9DD59D8F53}" type="slidenum">
+            <a:fld id="{9F211E95-DB63-4B1D-A3E8-7116A534ED0D}" type="slidenum">
               <a:rPr kumimoji="1" lang="ja-JP" altLang="en-US" smtClean="0"/>
               <a:t>‹#›</a:t>
             </a:fld>
@@ -2356,7 +2356,7 @@
     </p:spTree>
     <p:extLst>
       <p:ext uri="{BB962C8B-B14F-4D97-AF65-F5344CB8AC3E}">
-        <p14:creationId xmlns:p14="http://schemas.microsoft.com/office/powerpoint/2010/main" val="2667824233"/>
+        <p14:creationId xmlns:p14="http://schemas.microsoft.com/office/powerpoint/2010/main" val="4028330748"/>
       </p:ext>
     </p:extLst>
   </p:cSld>
@@ -2388,7 +2388,7 @@
           <p:cNvPr id="2" name="タイトル 1">
             <a:extLst>
               <a:ext uri="{FF2B5EF4-FFF2-40B4-BE49-F238E27FC236}">
-                <a16:creationId xmlns:a16="http://schemas.microsoft.com/office/drawing/2014/main" id="{74FB70C4-FDA7-53C7-8D4D-0D32DA79E196}"/>
+                <a16:creationId xmlns:a16="http://schemas.microsoft.com/office/drawing/2014/main" id="{570DC807-BC32-3308-96EC-14DCC7BE1208}"/>
               </a:ext>
             </a:extLst>
           </p:cNvPr>
@@ -2425,7 +2425,7 @@
           <p:cNvPr id="3" name="コンテンツ プレースホルダー 2">
             <a:extLst>
               <a:ext uri="{FF2B5EF4-FFF2-40B4-BE49-F238E27FC236}">
-                <a16:creationId xmlns:a16="http://schemas.microsoft.com/office/drawing/2014/main" id="{4DD74ED9-329B-8BD3-078D-0A7F6F77BCCC}"/>
+                <a16:creationId xmlns:a16="http://schemas.microsoft.com/office/drawing/2014/main" id="{4BA052CC-DB65-B194-7D68-76DDF2550204}"/>
               </a:ext>
             </a:extLst>
           </p:cNvPr>
@@ -2547,7 +2547,7 @@
           <p:cNvPr id="4" name="テキスト プレースホルダー 3">
             <a:extLst>
               <a:ext uri="{FF2B5EF4-FFF2-40B4-BE49-F238E27FC236}">
-                <a16:creationId xmlns:a16="http://schemas.microsoft.com/office/drawing/2014/main" id="{C90738D9-0343-C3B1-8BFE-B067E6F00728}"/>
+                <a16:creationId xmlns:a16="http://schemas.microsoft.com/office/drawing/2014/main" id="{FB69D8CB-A86D-CDE5-9D2C-CA911F120DD0}"/>
               </a:ext>
             </a:extLst>
           </p:cNvPr>
@@ -2618,7 +2618,7 @@
           <p:cNvPr id="5" name="日付プレースホルダー 4">
             <a:extLst>
               <a:ext uri="{FF2B5EF4-FFF2-40B4-BE49-F238E27FC236}">
-                <a16:creationId xmlns:a16="http://schemas.microsoft.com/office/drawing/2014/main" id="{121AB3E2-9318-5E79-6209-626C4487B8A4}"/>
+                <a16:creationId xmlns:a16="http://schemas.microsoft.com/office/drawing/2014/main" id="{41713920-2C3D-5B0F-135E-9945473B5786}"/>
               </a:ext>
             </a:extLst>
           </p:cNvPr>
@@ -2634,7 +2634,7 @@
           <a:bodyPr/>
           <a:lstStyle/>
           <a:p>
-            <a:fld id="{A8BFD11C-CA75-40A0-AB83-419F1E813C88}" type="datetimeFigureOut">
+            <a:fld id="{60872920-0609-4E1C-889D-CB1D901CB9A6}" type="datetimeFigureOut">
               <a:rPr kumimoji="1" lang="ja-JP" altLang="en-US" smtClean="0"/>
               <a:t>2026/7/30</a:t>
             </a:fld>
@@ -2647,7 +2647,7 @@
           <p:cNvPr id="6" name="フッター プレースホルダー 5">
             <a:extLst>
               <a:ext uri="{FF2B5EF4-FFF2-40B4-BE49-F238E27FC236}">
-                <a16:creationId xmlns:a16="http://schemas.microsoft.com/office/drawing/2014/main" id="{79C63693-80B9-6608-5DD1-6B3B3E2918CC}"/>
+                <a16:creationId xmlns:a16="http://schemas.microsoft.com/office/drawing/2014/main" id="{0DE694FA-64CE-BB48-052C-C1CCBE2058E7}"/>
               </a:ext>
             </a:extLst>
           </p:cNvPr>
@@ -2672,7 +2672,7 @@
           <p:cNvPr id="7" name="スライド番号プレースホルダー 6">
             <a:extLst>
               <a:ext uri="{FF2B5EF4-FFF2-40B4-BE49-F238E27FC236}">
-                <a16:creationId xmlns:a16="http://schemas.microsoft.com/office/drawing/2014/main" id="{49838E02-7007-F425-027C-250A1BB8D6EA}"/>
+                <a16:creationId xmlns:a16="http://schemas.microsoft.com/office/drawing/2014/main" id="{D503401F-0056-5BE2-BEAD-0E33D965E657}"/>
               </a:ext>
             </a:extLst>
           </p:cNvPr>
@@ -2688,7 +2688,7 @@
           <a:bodyPr/>
           <a:lstStyle/>
           <a:p>
-            <a:fld id="{3F373A78-01F1-4F7D-9C26-7F9DD59D8F53}" type="slidenum">
+            <a:fld id="{9F211E95-DB63-4B1D-A3E8-7116A534ED0D}" type="slidenum">
               <a:rPr kumimoji="1" lang="ja-JP" altLang="en-US" smtClean="0"/>
               <a:t>‹#›</a:t>
             </a:fld>
@@ -2699,7 +2699,7 @@
     </p:spTree>
     <p:extLst>
       <p:ext uri="{BB962C8B-B14F-4D97-AF65-F5344CB8AC3E}">
-        <p14:creationId xmlns:p14="http://schemas.microsoft.com/office/powerpoint/2010/main" val="955581075"/>
+        <p14:creationId xmlns:p14="http://schemas.microsoft.com/office/powerpoint/2010/main" val="785348040"/>
       </p:ext>
     </p:extLst>
   </p:cSld>
@@ -2731,7 +2731,7 @@
           <p:cNvPr id="2" name="タイトル 1">
             <a:extLst>
               <a:ext uri="{FF2B5EF4-FFF2-40B4-BE49-F238E27FC236}">
-                <a16:creationId xmlns:a16="http://schemas.microsoft.com/office/drawing/2014/main" id="{35A3C793-EE41-9A4B-441B-C4E594F8E41C}"/>
+                <a16:creationId xmlns:a16="http://schemas.microsoft.com/office/drawing/2014/main" id="{D5B5E521-148C-D923-C791-88B13FC895DB}"/>
               </a:ext>
             </a:extLst>
           </p:cNvPr>
@@ -2768,7 +2768,7 @@
           <p:cNvPr id="3" name="図プレースホルダー 2">
             <a:extLst>
               <a:ext uri="{FF2B5EF4-FFF2-40B4-BE49-F238E27FC236}">
-                <a16:creationId xmlns:a16="http://schemas.microsoft.com/office/drawing/2014/main" id="{FF9B5BD8-6D90-A2CB-9922-3FB8365283E2}"/>
+                <a16:creationId xmlns:a16="http://schemas.microsoft.com/office/drawing/2014/main" id="{799BFB85-AC4E-98D9-8D63-D366ADE1C936}"/>
               </a:ext>
             </a:extLst>
           </p:cNvPr>
@@ -2835,7 +2835,7 @@
           <p:cNvPr id="4" name="テキスト プレースホルダー 3">
             <a:extLst>
               <a:ext uri="{FF2B5EF4-FFF2-40B4-BE49-F238E27FC236}">
-                <a16:creationId xmlns:a16="http://schemas.microsoft.com/office/drawing/2014/main" id="{11630ED1-EA08-79B6-1C59-4415D1A0670B}"/>
+                <a16:creationId xmlns:a16="http://schemas.microsoft.com/office/drawing/2014/main" id="{91D3BF97-6300-3B83-D9DC-2005B3384870}"/>
               </a:ext>
             </a:extLst>
           </p:cNvPr>
@@ -2906,7 +2906,7 @@
           <p:cNvPr id="5" name="日付プレースホルダー 4">
             <a:extLst>
               <a:ext uri="{FF2B5EF4-FFF2-40B4-BE49-F238E27FC236}">
-                <a16:creationId xmlns:a16="http://schemas.microsoft.com/office/drawing/2014/main" id="{141DD569-E846-0960-07D8-BC7AF84F43BE}"/>
+                <a16:creationId xmlns:a16="http://schemas.microsoft.com/office/drawing/2014/main" id="{05FF3909-A7B1-03C4-D5C7-2C5222698893}"/>
               </a:ext>
             </a:extLst>
           </p:cNvPr>
@@ -2922,7 +2922,7 @@
           <a:bodyPr/>
           <a:lstStyle/>
           <a:p>
-            <a:fld id="{A8BFD11C-CA75-40A0-AB83-419F1E813C88}" type="datetimeFigureOut">
+            <a:fld id="{60872920-0609-4E1C-889D-CB1D901CB9A6}" type="datetimeFigureOut">
               <a:rPr kumimoji="1" lang="ja-JP" altLang="en-US" smtClean="0"/>
               <a:t>2026/7/30</a:t>
             </a:fld>
@@ -2935,7 +2935,7 @@
           <p:cNvPr id="6" name="フッター プレースホルダー 5">
             <a:extLst>
               <a:ext uri="{FF2B5EF4-FFF2-40B4-BE49-F238E27FC236}">
-                <a16:creationId xmlns:a16="http://schemas.microsoft.com/office/drawing/2014/main" id="{95AB5AFB-8FDE-6623-C3B5-B301CC470DBD}"/>
+                <a16:creationId xmlns:a16="http://schemas.microsoft.com/office/drawing/2014/main" id="{C276955A-3F57-8EE1-0658-050B198FC8D4}"/>
               </a:ext>
             </a:extLst>
           </p:cNvPr>
@@ -2960,7 +2960,7 @@
           <p:cNvPr id="7" name="スライド番号プレースホルダー 6">
             <a:extLst>
               <a:ext uri="{FF2B5EF4-FFF2-40B4-BE49-F238E27FC236}">
-                <a16:creationId xmlns:a16="http://schemas.microsoft.com/office/drawing/2014/main" id="{814E46D7-47C0-E5C8-BB7D-58C4D7E9CB7D}"/>
+                <a16:creationId xmlns:a16="http://schemas.microsoft.com/office/drawing/2014/main" id="{764E46A6-AE4F-AE93-5A05-710874E5A2BC}"/>
               </a:ext>
             </a:extLst>
           </p:cNvPr>
@@ -2976,7 +2976,7 @@
           <a:bodyPr/>
           <a:lstStyle/>
           <a:p>
-            <a:fld id="{3F373A78-01F1-4F7D-9C26-7F9DD59D8F53}" type="slidenum">
+            <a:fld id="{9F211E95-DB63-4B1D-A3E8-7116A534ED0D}" type="slidenum">
               <a:rPr kumimoji="1" lang="ja-JP" altLang="en-US" smtClean="0"/>
               <a:t>‹#›</a:t>
             </a:fld>
@@ -2987,7 +2987,7 @@
     </p:spTree>
     <p:extLst>
       <p:ext uri="{BB962C8B-B14F-4D97-AF65-F5344CB8AC3E}">
-        <p14:creationId xmlns:p14="http://schemas.microsoft.com/office/powerpoint/2010/main" val="3761603903"/>
+        <p14:creationId xmlns:p14="http://schemas.microsoft.com/office/powerpoint/2010/main" val="4067269682"/>
       </p:ext>
     </p:extLst>
   </p:cSld>
@@ -3024,7 +3024,7 @@
           <p:cNvPr id="2" name="タイトル プレースホルダー 1">
             <a:extLst>
               <a:ext uri="{FF2B5EF4-FFF2-40B4-BE49-F238E27FC236}">
-                <a16:creationId xmlns:a16="http://schemas.microsoft.com/office/drawing/2014/main" id="{3A933727-6692-2E08-E966-1219343042E0}"/>
+                <a16:creationId xmlns:a16="http://schemas.microsoft.com/office/drawing/2014/main" id="{EFE02D45-7B64-DE39-3461-938B98E356F3}"/>
               </a:ext>
             </a:extLst>
           </p:cNvPr>
@@ -3062,7 +3062,7 @@
           <p:cNvPr id="3" name="テキスト プレースホルダー 2">
             <a:extLst>
               <a:ext uri="{FF2B5EF4-FFF2-40B4-BE49-F238E27FC236}">
-                <a16:creationId xmlns:a16="http://schemas.microsoft.com/office/drawing/2014/main" id="{32346569-C655-5BD7-D4CF-87A3C3209F92}"/>
+                <a16:creationId xmlns:a16="http://schemas.microsoft.com/office/drawing/2014/main" id="{7A3EA57E-DD49-BFFC-C672-628112301ECC}"/>
               </a:ext>
             </a:extLst>
           </p:cNvPr>
@@ -3161,7 +3161,7 @@
           <p:cNvPr id="4" name="日付プレースホルダー 3">
             <a:extLst>
               <a:ext uri="{FF2B5EF4-FFF2-40B4-BE49-F238E27FC236}">
-                <a16:creationId xmlns:a16="http://schemas.microsoft.com/office/drawing/2014/main" id="{F2F01ED9-983E-2521-106E-626E5060138E}"/>
+                <a16:creationId xmlns:a16="http://schemas.microsoft.com/office/drawing/2014/main" id="{8E2BA80A-B623-A412-5601-ABCCE940D882}"/>
               </a:ext>
             </a:extLst>
           </p:cNvPr>
@@ -3195,7 +3195,7 @@
             </a:lvl1pPr>
           </a:lstStyle>
           <a:p>
-            <a:fld id="{A8BFD11C-CA75-40A0-AB83-419F1E813C88}" type="datetimeFigureOut">
+            <a:fld id="{60872920-0609-4E1C-889D-CB1D901CB9A6}" type="datetimeFigureOut">
               <a:rPr kumimoji="1" lang="ja-JP" altLang="en-US" smtClean="0"/>
               <a:t>2026/7/30</a:t>
             </a:fld>
@@ -3208,7 +3208,7 @@
           <p:cNvPr id="5" name="フッター プレースホルダー 4">
             <a:extLst>
               <a:ext uri="{FF2B5EF4-FFF2-40B4-BE49-F238E27FC236}">
-                <a16:creationId xmlns:a16="http://schemas.microsoft.com/office/drawing/2014/main" id="{9F5DF5E4-FCB6-F48A-5158-D6A052070532}"/>
+                <a16:creationId xmlns:a16="http://schemas.microsoft.com/office/drawing/2014/main" id="{F52F5EBC-5426-D286-02EB-8627DF7D5FBB}"/>
               </a:ext>
             </a:extLst>
           </p:cNvPr>
@@ -3251,7 +3251,7 @@
           <p:cNvPr id="6" name="スライド番号プレースホルダー 5">
             <a:extLst>
               <a:ext uri="{FF2B5EF4-FFF2-40B4-BE49-F238E27FC236}">
-                <a16:creationId xmlns:a16="http://schemas.microsoft.com/office/drawing/2014/main" id="{8C373482-F528-1BD1-3229-622A1DB99201}"/>
+                <a16:creationId xmlns:a16="http://schemas.microsoft.com/office/drawing/2014/main" id="{DB4C4EE5-DB15-50F1-5692-E008E17E10AD}"/>
               </a:ext>
             </a:extLst>
           </p:cNvPr>
@@ -3285,7 +3285,7 @@
             </a:lvl1pPr>
           </a:lstStyle>
           <a:p>
-            <a:fld id="{3F373A78-01F1-4F7D-9C26-7F9DD59D8F53}" type="slidenum">
+            <a:fld id="{9F211E95-DB63-4B1D-A3E8-7116A534ED0D}" type="slidenum">
               <a:rPr kumimoji="1" lang="ja-JP" altLang="en-US" smtClean="0"/>
               <a:t>‹#›</a:t>
             </a:fld>
@@ -3296,7 +3296,7 @@
     </p:spTree>
     <p:extLst>
       <p:ext uri="{BB962C8B-B14F-4D97-AF65-F5344CB8AC3E}">
-        <p14:creationId xmlns:p14="http://schemas.microsoft.com/office/powerpoint/2010/main" val="1157146690"/>
+        <p14:creationId xmlns:p14="http://schemas.microsoft.com/office/powerpoint/2010/main" val="3597961117"/>
       </p:ext>
     </p:extLst>
   </p:cSld>
@@ -3619,7 +3619,7 @@
           <p:cNvPr id="2" name="テキスト ボックス 1">
             <a:extLst>
               <a:ext uri="{FF2B5EF4-FFF2-40B4-BE49-F238E27FC236}">
-                <a16:creationId xmlns:a16="http://schemas.microsoft.com/office/drawing/2014/main" id="{B3733B7F-7343-2F36-B944-34F8FFF3A16D}"/>
+                <a16:creationId xmlns:a16="http://schemas.microsoft.com/office/drawing/2014/main" id="{52748F80-1992-21A9-6416-3439C2059C18}"/>
               </a:ext>
             </a:extLst>
           </p:cNvPr>
@@ -3665,7 +3665,7 @@
           <p:cNvPr id="3" name="テキスト ボックス 2">
             <a:extLst>
               <a:ext uri="{FF2B5EF4-FFF2-40B4-BE49-F238E27FC236}">
-                <a16:creationId xmlns:a16="http://schemas.microsoft.com/office/drawing/2014/main" id="{BD3EE5B1-3799-8CB2-BCF9-626D1AA17258}"/>
+                <a16:creationId xmlns:a16="http://schemas.microsoft.com/office/drawing/2014/main" id="{C4F90E0C-58FA-8C61-C744-0DECCA783BAB}"/>
               </a:ext>
             </a:extLst>
           </p:cNvPr>
@@ -3714,7 +3714,7 @@
           <p:cNvPr id="4" name="テキスト ボックス 3">
             <a:extLst>
               <a:ext uri="{FF2B5EF4-FFF2-40B4-BE49-F238E27FC236}">
-                <a16:creationId xmlns:a16="http://schemas.microsoft.com/office/drawing/2014/main" id="{65CB9471-A477-F862-B296-8C97EE44A5E4}"/>
+                <a16:creationId xmlns:a16="http://schemas.microsoft.com/office/drawing/2014/main" id="{3E2483A8-3F7A-EDD0-DAF8-D1C91A14B65D}"/>
               </a:ext>
             </a:extLst>
           </p:cNvPr>
@@ -3754,7 +3754,7 @@
           <p:cNvPr id="5" name="テキスト ボックス 4">
             <a:extLst>
               <a:ext uri="{FF2B5EF4-FFF2-40B4-BE49-F238E27FC236}">
-                <a16:creationId xmlns:a16="http://schemas.microsoft.com/office/drawing/2014/main" id="{BB96DB44-504A-CE6F-7D83-FDC704C03666}"/>
+                <a16:creationId xmlns:a16="http://schemas.microsoft.com/office/drawing/2014/main" id="{E8CDB88F-4F2F-64BC-3A4C-540C3361629B}"/>
               </a:ext>
             </a:extLst>
           </p:cNvPr>
@@ -3801,7 +3801,7 @@
             <a:hlinkClick r:id="" action="ppaction://media"/>
             <a:extLst>
               <a:ext uri="{FF2B5EF4-FFF2-40B4-BE49-F238E27FC236}">
-                <a16:creationId xmlns:a16="http://schemas.microsoft.com/office/drawing/2014/main" id="{C014106C-BDD8-207B-F630-45CF0CCD7B70}"/>
+                <a16:creationId xmlns:a16="http://schemas.microsoft.com/office/drawing/2014/main" id="{B7C8B80A-4707-094F-E2FC-1DEF1093978E}"/>
               </a:ext>
             </a:extLst>
           </p:cNvPr>
@@ -3836,7 +3836,7 @@
     </p:spTree>
     <p:extLst>
       <p:ext uri="{BB962C8B-B14F-4D97-AF65-F5344CB8AC3E}">
-        <p14:creationId xmlns:p14="http://schemas.microsoft.com/office/powerpoint/2010/main" val="522370256"/>
+        <p14:creationId xmlns:p14="http://schemas.microsoft.com/office/powerpoint/2010/main" val="1238881024"/>
       </p:ext>
     </p:extLst>
   </p:cSld>
@@ -3960,7 +3960,7 @@
           <p:cNvPr id="2" name="テキスト ボックス 1">
             <a:extLst>
               <a:ext uri="{FF2B5EF4-FFF2-40B4-BE49-F238E27FC236}">
-                <a16:creationId xmlns:a16="http://schemas.microsoft.com/office/drawing/2014/main" id="{6CC85552-AA15-B873-61FF-EA82F10AC316}"/>
+                <a16:creationId xmlns:a16="http://schemas.microsoft.com/office/drawing/2014/main" id="{1C97947C-F400-DF0C-1CA3-6C6423C3574C}"/>
               </a:ext>
             </a:extLst>
           </p:cNvPr>
@@ -4006,7 +4006,7 @@
           <p:cNvPr id="3" name="テキスト ボックス 2">
             <a:extLst>
               <a:ext uri="{FF2B5EF4-FFF2-40B4-BE49-F238E27FC236}">
-                <a16:creationId xmlns:a16="http://schemas.microsoft.com/office/drawing/2014/main" id="{8CE398A8-46C2-C75A-B721-D27C7E2E1373}"/>
+                <a16:creationId xmlns:a16="http://schemas.microsoft.com/office/drawing/2014/main" id="{C2BAAF85-F2BB-6D83-5070-77AFFD74416A}"/>
               </a:ext>
             </a:extLst>
           </p:cNvPr>
@@ -4046,7 +4046,7 @@
           <p:cNvPr id="4" name="テキスト ボックス 3">
             <a:extLst>
               <a:ext uri="{FF2B5EF4-FFF2-40B4-BE49-F238E27FC236}">
-                <a16:creationId xmlns:a16="http://schemas.microsoft.com/office/drawing/2014/main" id="{E9363154-D83B-A92B-6BDA-C11F3C35DF94}"/>
+                <a16:creationId xmlns:a16="http://schemas.microsoft.com/office/drawing/2014/main" id="{4BF35263-ACFA-1AFB-E5F3-49802681AA42}"/>
               </a:ext>
             </a:extLst>
           </p:cNvPr>
@@ -4110,7 +4110,7 @@
           <p:cNvPr id="5" name="テキスト ボックス 4">
             <a:extLst>
               <a:ext uri="{FF2B5EF4-FFF2-40B4-BE49-F238E27FC236}">
-                <a16:creationId xmlns:a16="http://schemas.microsoft.com/office/drawing/2014/main" id="{479CE37B-657A-67A7-70A1-0CF9B03C312A}"/>
+                <a16:creationId xmlns:a16="http://schemas.microsoft.com/office/drawing/2014/main" id="{8B71A67D-9719-2FF4-6CD1-E6C7C9F9FB69}"/>
               </a:ext>
             </a:extLst>
           </p:cNvPr>
@@ -4157,7 +4157,7 @@
             <a:hlinkClick r:id="" action="ppaction://media"/>
             <a:extLst>
               <a:ext uri="{FF2B5EF4-FFF2-40B4-BE49-F238E27FC236}">
-                <a16:creationId xmlns:a16="http://schemas.microsoft.com/office/drawing/2014/main" id="{9FEEAC28-7A8E-1E3A-F70B-6424E651ACAC}"/>
+                <a16:creationId xmlns:a16="http://schemas.microsoft.com/office/drawing/2014/main" id="{E4AD8D7F-E641-B2D9-F50E-55C14434B5B0}"/>
               </a:ext>
             </a:extLst>
           </p:cNvPr>
@@ -4192,7 +4192,7 @@
     </p:spTree>
     <p:extLst>
       <p:ext uri="{BB962C8B-B14F-4D97-AF65-F5344CB8AC3E}">
-        <p14:creationId xmlns:p14="http://schemas.microsoft.com/office/powerpoint/2010/main" val="627627434"/>
+        <p14:creationId xmlns:p14="http://schemas.microsoft.com/office/powerpoint/2010/main" val="812017275"/>
       </p:ext>
     </p:extLst>
   </p:cSld>
@@ -4316,7 +4316,7 @@
           <p:cNvPr id="2" name="テキスト ボックス 1">
             <a:extLst>
               <a:ext uri="{FF2B5EF4-FFF2-40B4-BE49-F238E27FC236}">
-                <a16:creationId xmlns:a16="http://schemas.microsoft.com/office/drawing/2014/main" id="{9AB8ACC6-C933-E7C9-CF2C-B80105D07699}"/>
+                <a16:creationId xmlns:a16="http://schemas.microsoft.com/office/drawing/2014/main" id="{9A77F9FA-9131-3A40-01A0-51D6B5A3E4E9}"/>
               </a:ext>
             </a:extLst>
           </p:cNvPr>
@@ -4362,7 +4362,7 @@
           <p:cNvPr id="3" name="テキスト ボックス 2">
             <a:extLst>
               <a:ext uri="{FF2B5EF4-FFF2-40B4-BE49-F238E27FC236}">
-                <a16:creationId xmlns:a16="http://schemas.microsoft.com/office/drawing/2014/main" id="{DDDE0B6B-8110-86F4-A2D7-36173AE7AD8B}"/>
+                <a16:creationId xmlns:a16="http://schemas.microsoft.com/office/drawing/2014/main" id="{F53F39F4-EEF3-5F1D-1869-7E910ABE0C0B}"/>
               </a:ext>
             </a:extLst>
           </p:cNvPr>
@@ -4402,7 +4402,7 @@
           <p:cNvPr id="4" name="テキスト ボックス 3">
             <a:extLst>
               <a:ext uri="{FF2B5EF4-FFF2-40B4-BE49-F238E27FC236}">
-                <a16:creationId xmlns:a16="http://schemas.microsoft.com/office/drawing/2014/main" id="{68BF5F3C-FBB2-FF7C-79DA-4D130B8F6B29}"/>
+                <a16:creationId xmlns:a16="http://schemas.microsoft.com/office/drawing/2014/main" id="{E35EAFA0-76A2-0060-8655-2662B9AF245B}"/>
               </a:ext>
             </a:extLst>
           </p:cNvPr>
@@ -4497,7 +4497,7 @@
           <p:cNvPr id="5" name="テキスト ボックス 4">
             <a:extLst>
               <a:ext uri="{FF2B5EF4-FFF2-40B4-BE49-F238E27FC236}">
-                <a16:creationId xmlns:a16="http://schemas.microsoft.com/office/drawing/2014/main" id="{F08E92FE-2A7C-30A1-01F2-DBD7669D612F}"/>
+                <a16:creationId xmlns:a16="http://schemas.microsoft.com/office/drawing/2014/main" id="{38DF8ABD-57C4-0BB8-81C4-5B2B56BE460C}"/>
               </a:ext>
             </a:extLst>
           </p:cNvPr>
@@ -4544,7 +4544,7 @@
             <a:hlinkClick r:id="" action="ppaction://media"/>
             <a:extLst>
               <a:ext uri="{FF2B5EF4-FFF2-40B4-BE49-F238E27FC236}">
-                <a16:creationId xmlns:a16="http://schemas.microsoft.com/office/drawing/2014/main" id="{4D29871A-AD43-EA52-843E-57ABE868CB37}"/>
+                <a16:creationId xmlns:a16="http://schemas.microsoft.com/office/drawing/2014/main" id="{4C04E3A1-08C5-16E3-D658-BFE6926C134C}"/>
               </a:ext>
             </a:extLst>
           </p:cNvPr>
@@ -4579,7 +4579,7 @@
     </p:spTree>
     <p:extLst>
       <p:ext uri="{BB962C8B-B14F-4D97-AF65-F5344CB8AC3E}">
-        <p14:creationId xmlns:p14="http://schemas.microsoft.com/office/powerpoint/2010/main" val="808528360"/>
+        <p14:creationId xmlns:p14="http://schemas.microsoft.com/office/powerpoint/2010/main" val="3569630818"/>
       </p:ext>
     </p:extLst>
   </p:cSld>
@@ -4703,7 +4703,7 @@
           <p:cNvPr id="2" name="テキスト ボックス 1">
             <a:extLst>
               <a:ext uri="{FF2B5EF4-FFF2-40B4-BE49-F238E27FC236}">
-                <a16:creationId xmlns:a16="http://schemas.microsoft.com/office/drawing/2014/main" id="{A72EF45D-E8EC-AEED-6D24-B68C5EDC4AF1}"/>
+                <a16:creationId xmlns:a16="http://schemas.microsoft.com/office/drawing/2014/main" id="{035D7223-C586-75C8-DD90-93C4AD41D24B}"/>
               </a:ext>
             </a:extLst>
           </p:cNvPr>
@@ -4749,7 +4749,7 @@
           <p:cNvPr id="3" name="テキスト ボックス 2">
             <a:extLst>
               <a:ext uri="{FF2B5EF4-FFF2-40B4-BE49-F238E27FC236}">
-                <a16:creationId xmlns:a16="http://schemas.microsoft.com/office/drawing/2014/main" id="{4EAB9F9E-6C84-545B-079A-505934513916}"/>
+                <a16:creationId xmlns:a16="http://schemas.microsoft.com/office/drawing/2014/main" id="{4599A3F6-4D39-1D08-1842-3BD365FFBDD2}"/>
               </a:ext>
             </a:extLst>
           </p:cNvPr>
@@ -4789,7 +4789,7 @@
           <p:cNvPr id="4" name="テキスト ボックス 3">
             <a:extLst>
               <a:ext uri="{FF2B5EF4-FFF2-40B4-BE49-F238E27FC236}">
-                <a16:creationId xmlns:a16="http://schemas.microsoft.com/office/drawing/2014/main" id="{79034050-3625-4AE6-0D1D-083E7B48F241}"/>
+                <a16:creationId xmlns:a16="http://schemas.microsoft.com/office/drawing/2014/main" id="{9E64A82F-533E-824F-6AB3-E6F6918580F2}"/>
               </a:ext>
             </a:extLst>
           </p:cNvPr>
@@ -4899,7 +4899,7 @@
           <p:cNvPr id="5" name="テキスト ボックス 4">
             <a:extLst>
               <a:ext uri="{FF2B5EF4-FFF2-40B4-BE49-F238E27FC236}">
-                <a16:creationId xmlns:a16="http://schemas.microsoft.com/office/drawing/2014/main" id="{440A933A-C17D-BE32-F167-A636293450C3}"/>
+                <a16:creationId xmlns:a16="http://schemas.microsoft.com/office/drawing/2014/main" id="{FB307345-B649-ACE1-0CE9-983D5CA59D92}"/>
               </a:ext>
             </a:extLst>
           </p:cNvPr>
@@ -4946,7 +4946,7 @@
             <a:hlinkClick r:id="" action="ppaction://media"/>
             <a:extLst>
               <a:ext uri="{FF2B5EF4-FFF2-40B4-BE49-F238E27FC236}">
-                <a16:creationId xmlns:a16="http://schemas.microsoft.com/office/drawing/2014/main" id="{716E6FD5-C5C2-46E0-90C5-6304E0DAC9D3}"/>
+                <a16:creationId xmlns:a16="http://schemas.microsoft.com/office/drawing/2014/main" id="{9D1E51BA-2FBB-3417-A943-6B67E0AA43EC}"/>
               </a:ext>
             </a:extLst>
           </p:cNvPr>
@@ -4981,7 +4981,7 @@
     </p:spTree>
     <p:extLst>
       <p:ext uri="{BB962C8B-B14F-4D97-AF65-F5344CB8AC3E}">
-        <p14:creationId xmlns:p14="http://schemas.microsoft.com/office/powerpoint/2010/main" val="3820914853"/>
+        <p14:creationId xmlns:p14="http://schemas.microsoft.com/office/powerpoint/2010/main" val="601477031"/>
       </p:ext>
     </p:extLst>
   </p:cSld>
@@ -5105,7 +5105,7 @@
           <p:cNvPr id="2" name="テキスト ボックス 1">
             <a:extLst>
               <a:ext uri="{FF2B5EF4-FFF2-40B4-BE49-F238E27FC236}">
-                <a16:creationId xmlns:a16="http://schemas.microsoft.com/office/drawing/2014/main" id="{ECA10D26-F94B-A61D-4E64-68C4660DF892}"/>
+                <a16:creationId xmlns:a16="http://schemas.microsoft.com/office/drawing/2014/main" id="{8726387A-AD24-F611-77C8-6B8BA8053EF4}"/>
               </a:ext>
             </a:extLst>
           </p:cNvPr>
@@ -5151,7 +5151,7 @@
           <p:cNvPr id="3" name="テキスト ボックス 2">
             <a:extLst>
               <a:ext uri="{FF2B5EF4-FFF2-40B4-BE49-F238E27FC236}">
-                <a16:creationId xmlns:a16="http://schemas.microsoft.com/office/drawing/2014/main" id="{2EAEA6A0-00A6-4BE7-4426-43DF1CB17923}"/>
+                <a16:creationId xmlns:a16="http://schemas.microsoft.com/office/drawing/2014/main" id="{CF606E86-86F9-FC9A-A310-92A7DBBDE1C3}"/>
               </a:ext>
             </a:extLst>
           </p:cNvPr>
@@ -5191,7 +5191,7 @@
           <p:cNvPr id="4" name="テキスト ボックス 3">
             <a:extLst>
               <a:ext uri="{FF2B5EF4-FFF2-40B4-BE49-F238E27FC236}">
-                <a16:creationId xmlns:a16="http://schemas.microsoft.com/office/drawing/2014/main" id="{86BC180C-F670-9133-56E5-59A15DB67BA3}"/>
+                <a16:creationId xmlns:a16="http://schemas.microsoft.com/office/drawing/2014/main" id="{3AE3B932-ACE8-1757-A234-5C18FDEB79F2}"/>
               </a:ext>
             </a:extLst>
           </p:cNvPr>
@@ -5215,20 +5215,14 @@
           <a:lstStyle/>
           <a:p>
             <a:r>
-              <a:rPr kumimoji="1" lang="en-US" altLang="ja-JP" sz="2000">
+              <a:rPr kumimoji="1" lang="ja-JP" altLang="en-US" sz="2000">
                 <a:solidFill>
                   <a:srgbClr val="333333"/>
                 </a:solidFill>
                 <a:latin typeface="Arial" panose="020B0604020202020204" pitchFamily="34" charset="0"/>
               </a:rPr>
-              <a:t>Set confirmed custom domain</a:t>
-            </a:r>
-            <a:endParaRPr kumimoji="1" lang="ja-JP" altLang="en-US" sz="2000">
-              <a:solidFill>
-                <a:srgbClr val="333333"/>
-              </a:solidFill>
-              <a:latin typeface="Arial" panose="020B0604020202020204" pitchFamily="34" charset="0"/>
-            </a:endParaRPr>
+              <a:t>直近のコミットでは、実装の見直しと継続的な改善が行われました。</a:t>
+            </a:r>
           </a:p>
         </p:txBody>
       </p:sp>
@@ -5237,7 +5231,7 @@
           <p:cNvPr id="5" name="テキスト ボックス 4">
             <a:extLst>
               <a:ext uri="{FF2B5EF4-FFF2-40B4-BE49-F238E27FC236}">
-                <a16:creationId xmlns:a16="http://schemas.microsoft.com/office/drawing/2014/main" id="{90C755C0-0CB1-0E30-0CFC-A951FB3D549C}"/>
+                <a16:creationId xmlns:a16="http://schemas.microsoft.com/office/drawing/2014/main" id="{4AB47AB1-745A-D2E2-04F3-189833E72518}"/>
               </a:ext>
             </a:extLst>
           </p:cNvPr>
@@ -5284,7 +5278,7 @@
             <a:hlinkClick r:id="" action="ppaction://media"/>
             <a:extLst>
               <a:ext uri="{FF2B5EF4-FFF2-40B4-BE49-F238E27FC236}">
-                <a16:creationId xmlns:a16="http://schemas.microsoft.com/office/drawing/2014/main" id="{CA9B4580-6D29-3C04-178F-3E46886BE397}"/>
+                <a16:creationId xmlns:a16="http://schemas.microsoft.com/office/drawing/2014/main" id="{65E823A6-5A55-01A0-5B91-405167D61C08}"/>
               </a:ext>
             </a:extLst>
           </p:cNvPr>
@@ -5319,7 +5313,7 @@
     </p:spTree>
     <p:extLst>
       <p:ext uri="{BB962C8B-B14F-4D97-AF65-F5344CB8AC3E}">
-        <p14:creationId xmlns:p14="http://schemas.microsoft.com/office/powerpoint/2010/main" val="2483022868"/>
+        <p14:creationId xmlns:p14="http://schemas.microsoft.com/office/powerpoint/2010/main" val="1418645803"/>
       </p:ext>
     </p:extLst>
   </p:cSld>
@@ -5362,7 +5356,7 @@
                                   <p:childTnLst>
                                     <p:cmd type="call" cmd="playFrom(0.0)">
                                       <p:cBhvr>
-                                        <p:cTn id="6" dur="6451" fill="hold"/>
+                                        <p:cTn id="6" dur="6076" fill="hold"/>
                                         <p:tgtEl>
                                           <p:spTgt spid="6"/>
                                         </p:tgtEl>
@@ -5443,7 +5437,7 @@
           <p:cNvPr id="2" name="テキスト ボックス 1">
             <a:extLst>
               <a:ext uri="{FF2B5EF4-FFF2-40B4-BE49-F238E27FC236}">
-                <a16:creationId xmlns:a16="http://schemas.microsoft.com/office/drawing/2014/main" id="{D1056BD1-A114-DF4D-943B-8F5C702415C5}"/>
+                <a16:creationId xmlns:a16="http://schemas.microsoft.com/office/drawing/2014/main" id="{2433CD78-01C9-912C-9055-FD9EED7943CD}"/>
               </a:ext>
             </a:extLst>
           </p:cNvPr>
@@ -5489,7 +5483,7 @@
           <p:cNvPr id="3" name="テキスト ボックス 2">
             <a:extLst>
               <a:ext uri="{FF2B5EF4-FFF2-40B4-BE49-F238E27FC236}">
-                <a16:creationId xmlns:a16="http://schemas.microsoft.com/office/drawing/2014/main" id="{4069A6DB-B215-A229-D458-91FFFC3F30B5}"/>
+                <a16:creationId xmlns:a16="http://schemas.microsoft.com/office/drawing/2014/main" id="{B5AF2E1B-E300-3DBD-0C38-0CA7B5009C04}"/>
               </a:ext>
             </a:extLst>
           </p:cNvPr>
@@ -5529,7 +5523,7 @@
           <p:cNvPr id="4" name="テキスト ボックス 3">
             <a:extLst>
               <a:ext uri="{FF2B5EF4-FFF2-40B4-BE49-F238E27FC236}">
-                <a16:creationId xmlns:a16="http://schemas.microsoft.com/office/drawing/2014/main" id="{F11DF3A0-67F1-8EC0-7221-7341B8702674}"/>
+                <a16:creationId xmlns:a16="http://schemas.microsoft.com/office/drawing/2014/main" id="{B7B5A7FC-EEBF-84DE-CB90-0A60CFD0293E}"/>
               </a:ext>
             </a:extLst>
           </p:cNvPr>
@@ -5594,7 +5588,7 @@
           <p:cNvPr id="5" name="テキスト ボックス 4">
             <a:extLst>
               <a:ext uri="{FF2B5EF4-FFF2-40B4-BE49-F238E27FC236}">
-                <a16:creationId xmlns:a16="http://schemas.microsoft.com/office/drawing/2014/main" id="{3313506A-A0E8-AC02-5AFC-6959B2C780F9}"/>
+                <a16:creationId xmlns:a16="http://schemas.microsoft.com/office/drawing/2014/main" id="{04FAB83E-C0A8-F875-94B1-B1E987E92D56}"/>
               </a:ext>
             </a:extLst>
           </p:cNvPr>
@@ -5641,7 +5635,7 @@
             <a:hlinkClick r:id="" action="ppaction://media"/>
             <a:extLst>
               <a:ext uri="{FF2B5EF4-FFF2-40B4-BE49-F238E27FC236}">
-                <a16:creationId xmlns:a16="http://schemas.microsoft.com/office/drawing/2014/main" id="{F53DC6BF-4C61-6177-BD5A-8C690C55FEE5}"/>
+                <a16:creationId xmlns:a16="http://schemas.microsoft.com/office/drawing/2014/main" id="{EE326A5A-4F60-B3CC-3768-95028754B18A}"/>
               </a:ext>
             </a:extLst>
           </p:cNvPr>
@@ -5676,7 +5670,7 @@
     </p:spTree>
     <p:extLst>
       <p:ext uri="{BB962C8B-B14F-4D97-AF65-F5344CB8AC3E}">
-        <p14:creationId xmlns:p14="http://schemas.microsoft.com/office/powerpoint/2010/main" val="1187263815"/>
+        <p14:creationId xmlns:p14="http://schemas.microsoft.com/office/powerpoint/2010/main" val="64147877"/>
       </p:ext>
     </p:extLst>
   </p:cSld>
